--- a/QI디자인.pptx
+++ b/QI디자인.pptx
@@ -230,7 +230,7 @@
           <a:p>
             <a:fld id="{9D028996-76AB-4EEC-B8A2-E5F6960D5750}" type="datetimeFigureOut">
               <a:rPr lang="ko-KR" altLang="en-US" smtClean="0"/>
-              <a:t>2026-01-05</a:t>
+              <a:t>2026-01-08</a:t>
             </a:fld>
             <a:endParaRPr lang="ko-KR" altLang="en-US"/>
           </a:p>
@@ -926,7 +926,7 @@
           <a:p>
             <a:fld id="{ACC882CF-AC0D-4E57-855A-D43B4601F3DC}" type="datetimeFigureOut">
               <a:rPr lang="ko-KR" altLang="en-US" smtClean="0"/>
-              <a:t>2026-01-05</a:t>
+              <a:t>2026-01-08</a:t>
             </a:fld>
             <a:endParaRPr lang="ko-KR" altLang="en-US"/>
           </a:p>
@@ -1124,7 +1124,7 @@
           <a:p>
             <a:fld id="{ACC882CF-AC0D-4E57-855A-D43B4601F3DC}" type="datetimeFigureOut">
               <a:rPr lang="ko-KR" altLang="en-US" smtClean="0"/>
-              <a:t>2026-01-05</a:t>
+              <a:t>2026-01-08</a:t>
             </a:fld>
             <a:endParaRPr lang="ko-KR" altLang="en-US"/>
           </a:p>
@@ -1332,7 +1332,7 @@
           <a:p>
             <a:fld id="{ACC882CF-AC0D-4E57-855A-D43B4601F3DC}" type="datetimeFigureOut">
               <a:rPr lang="ko-KR" altLang="en-US" smtClean="0"/>
-              <a:t>2026-01-05</a:t>
+              <a:t>2026-01-08</a:t>
             </a:fld>
             <a:endParaRPr lang="ko-KR" altLang="en-US"/>
           </a:p>
@@ -1530,7 +1530,7 @@
           <a:p>
             <a:fld id="{ACC882CF-AC0D-4E57-855A-D43B4601F3DC}" type="datetimeFigureOut">
               <a:rPr lang="ko-KR" altLang="en-US" smtClean="0"/>
-              <a:t>2026-01-05</a:t>
+              <a:t>2026-01-08</a:t>
             </a:fld>
             <a:endParaRPr lang="ko-KR" altLang="en-US"/>
           </a:p>
@@ -1821,7 +1821,7 @@
           <a:p>
             <a:fld id="{ACC882CF-AC0D-4E57-855A-D43B4601F3DC}" type="datetimeFigureOut">
               <a:rPr lang="ko-KR" altLang="en-US" smtClean="0"/>
-              <a:t>2026-01-05</a:t>
+              <a:t>2026-01-08</a:t>
             </a:fld>
             <a:endParaRPr lang="ko-KR" altLang="en-US"/>
           </a:p>
@@ -2102,7 +2102,7 @@
           <a:p>
             <a:fld id="{ACC882CF-AC0D-4E57-855A-D43B4601F3DC}" type="datetimeFigureOut">
               <a:rPr lang="ko-KR" altLang="en-US" smtClean="0"/>
-              <a:t>2026-01-05</a:t>
+              <a:t>2026-01-08</a:t>
             </a:fld>
             <a:endParaRPr lang="ko-KR" altLang="en-US"/>
           </a:p>
@@ -2530,7 +2530,7 @@
           <a:p>
             <a:fld id="{ACC882CF-AC0D-4E57-855A-D43B4601F3DC}" type="datetimeFigureOut">
               <a:rPr lang="ko-KR" altLang="en-US" smtClean="0"/>
-              <a:t>2026-01-05</a:t>
+              <a:t>2026-01-08</a:t>
             </a:fld>
             <a:endParaRPr lang="ko-KR" altLang="en-US"/>
           </a:p>
@@ -2687,7 +2687,7 @@
           <a:p>
             <a:fld id="{ACC882CF-AC0D-4E57-855A-D43B4601F3DC}" type="datetimeFigureOut">
               <a:rPr lang="ko-KR" altLang="en-US" smtClean="0"/>
-              <a:t>2026-01-05</a:t>
+              <a:t>2026-01-08</a:t>
             </a:fld>
             <a:endParaRPr lang="ko-KR" altLang="en-US"/>
           </a:p>
@@ -2816,7 +2816,7 @@
           <a:p>
             <a:fld id="{ACC882CF-AC0D-4E57-855A-D43B4601F3DC}" type="datetimeFigureOut">
               <a:rPr lang="ko-KR" altLang="en-US" smtClean="0"/>
-              <a:t>2026-01-05</a:t>
+              <a:t>2026-01-08</a:t>
             </a:fld>
             <a:endParaRPr lang="ko-KR" altLang="en-US"/>
           </a:p>
@@ -3143,7 +3143,7 @@
           <a:p>
             <a:fld id="{ACC882CF-AC0D-4E57-855A-D43B4601F3DC}" type="datetimeFigureOut">
               <a:rPr lang="ko-KR" altLang="en-US" smtClean="0"/>
-              <a:t>2026-01-05</a:t>
+              <a:t>2026-01-08</a:t>
             </a:fld>
             <a:endParaRPr lang="ko-KR" altLang="en-US"/>
           </a:p>
@@ -3431,7 +3431,7 @@
           <a:p>
             <a:fld id="{ACC882CF-AC0D-4E57-855A-D43B4601F3DC}" type="datetimeFigureOut">
               <a:rPr lang="ko-KR" altLang="en-US" smtClean="0"/>
-              <a:t>2026-01-05</a:t>
+              <a:t>2026-01-08</a:t>
             </a:fld>
             <a:endParaRPr lang="ko-KR" altLang="en-US"/>
           </a:p>
@@ -3672,7 +3672,7 @@
           <a:p>
             <a:fld id="{ACC882CF-AC0D-4E57-855A-D43B4601F3DC}" type="datetimeFigureOut">
               <a:rPr lang="ko-KR" altLang="en-US" smtClean="0"/>
-              <a:t>2026-01-05</a:t>
+              <a:t>2026-01-08</a:t>
             </a:fld>
             <a:endParaRPr lang="ko-KR" altLang="en-US"/>
           </a:p>
@@ -4103,7 +4103,7 @@
         </p:nvSpPr>
         <p:spPr>
           <a:xfrm>
-            <a:off x="4488874" y="2372484"/>
+            <a:off x="4412141" y="2339719"/>
             <a:ext cx="786512" cy="230832"/>
           </a:xfrm>
           <a:prstGeom prst="rect">
@@ -4153,7 +4153,7 @@
         </p:nvSpPr>
         <p:spPr>
           <a:xfrm>
-            <a:off x="5275386" y="3765032"/>
+            <a:off x="5501853" y="4022067"/>
             <a:ext cx="1299132" cy="230832"/>
           </a:xfrm>
           <a:prstGeom prst="rect">
@@ -4201,14 +4201,14 @@
           <p:cNvCxnSpPr>
             <a:cxnSpLocks/>
             <a:stCxn id="4" idx="2"/>
-            <a:endCxn id="5" idx="0"/>
+            <a:endCxn id="15" idx="1"/>
           </p:cNvCxnSpPr>
           <p:nvPr/>
         </p:nvCxnSpPr>
         <p:spPr>
           <a:xfrm>
-            <a:off x="4882130" y="2603316"/>
-            <a:ext cx="1042822" cy="1161716"/>
+            <a:off x="4805397" y="2570551"/>
+            <a:ext cx="696456" cy="733757"/>
           </a:xfrm>
           <a:prstGeom prst="straightConnector1">
             <a:avLst/>
@@ -4246,7 +4246,7 @@
         </p:nvSpPr>
         <p:spPr>
           <a:xfrm>
-            <a:off x="5096342" y="2455135"/>
+            <a:off x="4367113" y="2050036"/>
             <a:ext cx="786512" cy="230832"/>
           </a:xfrm>
           <a:prstGeom prst="rect">
@@ -4280,14 +4280,14 @@
           <p:cNvCxnSpPr>
             <a:cxnSpLocks/>
             <a:stCxn id="4" idx="2"/>
-            <a:endCxn id="12" idx="0"/>
+            <a:endCxn id="6" idx="3"/>
           </p:cNvCxnSpPr>
           <p:nvPr/>
         </p:nvCxnSpPr>
         <p:spPr>
           <a:xfrm flipH="1">
-            <a:off x="3452980" y="2603316"/>
-            <a:ext cx="1429150" cy="1163621"/>
+            <a:off x="4162760" y="2570551"/>
+            <a:ext cx="642637" cy="743033"/>
           </a:xfrm>
           <a:prstGeom prst="straightConnector1">
             <a:avLst/>
@@ -4325,7 +4325,7 @@
         </p:nvSpPr>
         <p:spPr>
           <a:xfrm>
-            <a:off x="2743200" y="3766937"/>
+            <a:off x="2743200" y="3914311"/>
             <a:ext cx="1419560" cy="230832"/>
           </a:xfrm>
           <a:prstGeom prst="rect">
@@ -4375,7 +4375,7 @@
         </p:nvSpPr>
         <p:spPr>
           <a:xfrm>
-            <a:off x="5364907" y="2953342"/>
+            <a:off x="4965697" y="2722734"/>
             <a:ext cx="786512" cy="230832"/>
           </a:xfrm>
           <a:prstGeom prst="rect">
@@ -4412,7 +4412,7 @@
         </p:nvSpPr>
         <p:spPr>
           <a:xfrm>
-            <a:off x="3460974" y="2953342"/>
+            <a:off x="3742578" y="2725297"/>
             <a:ext cx="786512" cy="230832"/>
           </a:xfrm>
           <a:prstGeom prst="rect">
@@ -4452,8 +4452,8 @@
         </p:nvCxnSpPr>
         <p:spPr>
           <a:xfrm flipV="1">
-            <a:off x="6574518" y="3874687"/>
-            <a:ext cx="885624" cy="5761"/>
+            <a:off x="6800985" y="4117990"/>
+            <a:ext cx="767325" cy="19493"/>
           </a:xfrm>
           <a:prstGeom prst="straightConnector1">
             <a:avLst/>
@@ -4527,7 +4527,7 @@
         </p:nvSpPr>
         <p:spPr>
           <a:xfrm>
-            <a:off x="7460142" y="3759271"/>
+            <a:off x="7568310" y="4002574"/>
             <a:ext cx="1336429" cy="230832"/>
           </a:xfrm>
           <a:prstGeom prst="rect">
@@ -4631,8 +4631,8 @@
         </p:nvCxnSpPr>
         <p:spPr>
           <a:xfrm>
-            <a:off x="3452980" y="3997769"/>
-            <a:ext cx="0" cy="578402"/>
+            <a:off x="3452980" y="4145143"/>
+            <a:ext cx="0" cy="431028"/>
           </a:xfrm>
           <a:prstGeom prst="straightConnector1">
             <a:avLst/>
@@ -4670,7 +4670,7 @@
         </p:nvSpPr>
         <p:spPr>
           <a:xfrm>
-            <a:off x="7568311" y="4345339"/>
+            <a:off x="7676479" y="4588642"/>
             <a:ext cx="1120090" cy="230832"/>
           </a:xfrm>
           <a:prstGeom prst="rect">
@@ -4724,7 +4724,7 @@
         </p:nvCxnSpPr>
         <p:spPr>
           <a:xfrm flipH="1">
-            <a:off x="8128356" y="3990103"/>
+            <a:off x="8236524" y="4233406"/>
             <a:ext cx="1" cy="355236"/>
           </a:xfrm>
           <a:prstGeom prst="straightConnector1">
@@ -4763,7 +4763,7 @@
         </p:nvSpPr>
         <p:spPr>
           <a:xfrm>
-            <a:off x="8029243" y="4056138"/>
+            <a:off x="8137411" y="4299441"/>
             <a:ext cx="866442" cy="230832"/>
           </a:xfrm>
           <a:prstGeom prst="rect">
@@ -4834,7 +4834,7 @@
         </p:nvSpPr>
         <p:spPr>
           <a:xfrm>
-            <a:off x="9413630" y="4345339"/>
+            <a:off x="9521798" y="4588642"/>
             <a:ext cx="1349221" cy="230832"/>
           </a:xfrm>
           <a:prstGeom prst="rect">
@@ -4887,7 +4887,7 @@
         </p:nvCxnSpPr>
         <p:spPr>
           <a:xfrm>
-            <a:off x="8796571" y="3874687"/>
+            <a:off x="8904739" y="4117990"/>
             <a:ext cx="1291670" cy="470652"/>
           </a:xfrm>
           <a:prstGeom prst="straightConnector1">
@@ -4926,7 +4926,7 @@
         </p:nvSpPr>
         <p:spPr>
           <a:xfrm>
-            <a:off x="9101369" y="3825306"/>
+            <a:off x="9209537" y="4068609"/>
             <a:ext cx="866442" cy="230832"/>
           </a:xfrm>
           <a:prstGeom prst="rect">
@@ -4948,6 +4948,190 @@
           </a:p>
         </p:txBody>
       </p:sp>
+      <p:sp>
+        <p:nvSpPr>
+          <p:cNvPr id="6" name="TextBox 5">
+            <a:extLst>
+              <a:ext uri="{FF2B5EF4-FFF2-40B4-BE49-F238E27FC236}">
+                <a16:creationId xmlns:a16="http://schemas.microsoft.com/office/drawing/2014/main" id="{143BC65F-8739-9EDB-47E4-1EB51908134E}"/>
+              </a:ext>
+            </a:extLst>
+          </p:cNvPr>
+          <p:cNvSpPr txBox="1"/>
+          <p:nvPr/>
+        </p:nvSpPr>
+        <p:spPr>
+          <a:xfrm>
+            <a:off x="2743200" y="3198168"/>
+            <a:ext cx="1419560" cy="230832"/>
+          </a:xfrm>
+          <a:prstGeom prst="rect">
+            <a:avLst/>
+          </a:prstGeom>
+        </p:spPr>
+        <p:style>
+          <a:lnRef idx="2">
+            <a:schemeClr val="accent5"/>
+          </a:lnRef>
+          <a:fillRef idx="1">
+            <a:schemeClr val="lt1"/>
+          </a:fillRef>
+          <a:effectRef idx="0">
+            <a:schemeClr val="accent5"/>
+          </a:effectRef>
+          <a:fontRef idx="minor">
+            <a:schemeClr val="dk1"/>
+          </a:fontRef>
+        </p:style>
+        <p:txBody>
+          <a:bodyPr wrap="square" rtlCol="0">
+            <a:spAutoFit/>
+          </a:bodyPr>
+          <a:lstStyle/>
+          <a:p>
+            <a:pPr algn="ctr"/>
+            <a:r>
+              <a:rPr lang="en-US" altLang="ko-KR" sz="900" dirty="0"/>
+              <a:t>recv_summary.html</a:t>
+            </a:r>
+            <a:endParaRPr lang="ko-KR" altLang="en-US" sz="900" dirty="0"/>
+          </a:p>
+        </p:txBody>
+      </p:sp>
+      <p:sp>
+        <p:nvSpPr>
+          <p:cNvPr id="15" name="TextBox 14">
+            <a:extLst>
+              <a:ext uri="{FF2B5EF4-FFF2-40B4-BE49-F238E27FC236}">
+                <a16:creationId xmlns:a16="http://schemas.microsoft.com/office/drawing/2014/main" id="{13420220-20F9-28A5-3ABD-924021A3BBB8}"/>
+              </a:ext>
+            </a:extLst>
+          </p:cNvPr>
+          <p:cNvSpPr txBox="1"/>
+          <p:nvPr/>
+        </p:nvSpPr>
+        <p:spPr>
+          <a:xfrm>
+            <a:off x="5501853" y="3188892"/>
+            <a:ext cx="1299132" cy="230832"/>
+          </a:xfrm>
+          <a:prstGeom prst="rect">
+            <a:avLst/>
+          </a:prstGeom>
+        </p:spPr>
+        <p:style>
+          <a:lnRef idx="2">
+            <a:schemeClr val="accent5"/>
+          </a:lnRef>
+          <a:fillRef idx="1">
+            <a:schemeClr val="lt1"/>
+          </a:fillRef>
+          <a:effectRef idx="0">
+            <a:schemeClr val="accent5"/>
+          </a:effectRef>
+          <a:fontRef idx="minor">
+            <a:schemeClr val="dk1"/>
+          </a:fontRef>
+        </p:style>
+        <p:txBody>
+          <a:bodyPr wrap="square" rtlCol="0">
+            <a:spAutoFit/>
+          </a:bodyPr>
+          <a:lstStyle/>
+          <a:p>
+            <a:pPr algn="ctr"/>
+            <a:r>
+              <a:rPr lang="en-US" altLang="ko-KR" sz="900" dirty="0"/>
+              <a:t>noti_summary.html</a:t>
+            </a:r>
+            <a:endParaRPr lang="ko-KR" altLang="en-US" sz="900" dirty="0"/>
+          </a:p>
+        </p:txBody>
+      </p:sp>
+      <p:cxnSp>
+        <p:nvCxnSpPr>
+          <p:cNvPr id="32" name="직선 화살표 연결선 31">
+            <a:extLst>
+              <a:ext uri="{FF2B5EF4-FFF2-40B4-BE49-F238E27FC236}">
+                <a16:creationId xmlns:a16="http://schemas.microsoft.com/office/drawing/2014/main" id="{209D3796-A038-C6F4-0779-E4126D488014}"/>
+              </a:ext>
+            </a:extLst>
+          </p:cNvPr>
+          <p:cNvCxnSpPr>
+            <a:stCxn id="15" idx="2"/>
+            <a:endCxn id="5" idx="0"/>
+          </p:cNvCxnSpPr>
+          <p:nvPr/>
+        </p:nvCxnSpPr>
+        <p:spPr>
+          <a:xfrm>
+            <a:off x="6151419" y="3419724"/>
+            <a:ext cx="0" cy="602343"/>
+          </a:xfrm>
+          <a:prstGeom prst="straightConnector1">
+            <a:avLst/>
+          </a:prstGeom>
+          <a:ln>
+            <a:tailEnd type="triangle"/>
+          </a:ln>
+        </p:spPr>
+        <p:style>
+          <a:lnRef idx="1">
+            <a:schemeClr val="accent1"/>
+          </a:lnRef>
+          <a:fillRef idx="0">
+            <a:schemeClr val="accent1"/>
+          </a:fillRef>
+          <a:effectRef idx="0">
+            <a:schemeClr val="accent1"/>
+          </a:effectRef>
+          <a:fontRef idx="minor">
+            <a:schemeClr val="tx1"/>
+          </a:fontRef>
+        </p:style>
+      </p:cxnSp>
+      <p:cxnSp>
+        <p:nvCxnSpPr>
+          <p:cNvPr id="36" name="직선 화살표 연결선 35">
+            <a:extLst>
+              <a:ext uri="{FF2B5EF4-FFF2-40B4-BE49-F238E27FC236}">
+                <a16:creationId xmlns:a16="http://schemas.microsoft.com/office/drawing/2014/main" id="{49F2E274-479A-86B6-2293-375F67547723}"/>
+              </a:ext>
+            </a:extLst>
+          </p:cNvPr>
+          <p:cNvCxnSpPr>
+            <a:stCxn id="6" idx="2"/>
+            <a:endCxn id="12" idx="0"/>
+          </p:cNvCxnSpPr>
+          <p:nvPr/>
+        </p:nvCxnSpPr>
+        <p:spPr>
+          <a:xfrm>
+            <a:off x="3452980" y="3429000"/>
+            <a:ext cx="0" cy="485311"/>
+          </a:xfrm>
+          <a:prstGeom prst="straightConnector1">
+            <a:avLst/>
+          </a:prstGeom>
+          <a:ln>
+            <a:tailEnd type="triangle"/>
+          </a:ln>
+        </p:spPr>
+        <p:style>
+          <a:lnRef idx="1">
+            <a:schemeClr val="accent1"/>
+          </a:lnRef>
+          <a:fillRef idx="0">
+            <a:schemeClr val="accent1"/>
+          </a:fillRef>
+          <a:effectRef idx="0">
+            <a:schemeClr val="accent1"/>
+          </a:effectRef>
+          <a:fontRef idx="minor">
+            <a:schemeClr val="tx1"/>
+          </a:fontRef>
+        </p:style>
+      </p:cxnSp>
     </p:spTree>
     <p:extLst>
       <p:ext uri="{BB962C8B-B14F-4D97-AF65-F5344CB8AC3E}">
